--- a/public/fun/pack/pptx/weddingpro/결혼식프리미엄_06_소개중심_민트플래티넘.pptx
+++ b/public/fun/pack/pptx/weddingpro/결혼식프리미엄_06_소개중심_민트플래티넘.pptx
@@ -113,12 +113,12 @@
   <p:extLst>
     <p:ext uri="{521415D9-36F7-43E2-AB2F-B90AF26B5E84}">
       <p14:sectionLst xmlns:p14="http://schemas.microsoft.com/office/powerpoint/2010/main">
-        <p14:section name="시작" id="{40BA4CFA-A805-4109-A407-63EAA9850359}">
+        <p14:section name="시작" id="{8647A4D1-F66B-4662-B927-9A8C472B01EB}">
           <p14:sldIdLst>
             <p14:sldId id="256"/>
           </p14:sldIdLst>
         </p14:section>
-        <p14:section name="본문" id="{A57B4D5B-AB95-4D1A-B92F-1F8EA966819A}">
+        <p14:section name="본문" id="{2A775D4E-727A-4CB1-8F9A-DD14229A388C}">
           <p14:sldIdLst>
             <p14:sldId id="257"/>
             <p14:sldId id="258"/>
@@ -127,7 +127,7 @@
             <p14:sldId id="261"/>
           </p14:sldIdLst>
         </p14:section>
-        <p14:section name="마무리" id="{2C3CE5C4-F2C9-4584-A129-9BAD8CF6069D}">
+        <p14:section name="마무리" id="{EC4007C4-9156-41C4-A87E-6EC72B8221D2}">
           <p14:sldIdLst>
             <p14:sldId id="262"/>
           </p14:sldIdLst>
@@ -1470,7 +1470,7 @@
             </a:lvl1pPr>
           </a:lstStyle>
           <a:p>
-            <a:fld id="{E5DBEC54-3771-48FE-A2D2-D64E3E6612A7}" type="slidenum">
+            <a:fld id="{DAC00F4D-8B24-44E3-8A04-2B1DA3E68195}" type="slidenum">
               <a:rPr lang="en-US"/>
               <a:t>‹#›</a:t>
             </a:fld>
@@ -2131,7 +2131,7 @@
             </a:lvl1pPr>
           </a:lstStyle>
           <a:p>
-            <a:fld id="{8B433B23-B2A0-4060-965F-9663D7704734}" type="slidenum">
+            <a:fld id="{2D04A5C4-F7CB-4868-92A6-15D66019535A}" type="slidenum">
               <a:rPr lang="en-US"/>
               <a:t>‹#›</a:t>
             </a:fld>
@@ -2819,7 +2819,7 @@
             </a:lvl1pPr>
           </a:lstStyle>
           <a:p>
-            <a:fld id="{E7EB038B-275E-4062-852B-F4112FC5FC78}" type="slidenum">
+            <a:fld id="{10DA4144-C0DE-4C66-B559-19ADF76BBB51}" type="slidenum">
               <a:rPr lang="en-US"/>
               <a:t>‹#›</a:t>
             </a:fld>
@@ -3736,7 +3736,7 @@
           <a:p>
             <a:r>
               <a:rPr lang="ko-KR"/>
-              <a:t>0000. 00. 00 · 예식장 이름</a:t>
+              <a:t>날짜 입력 · 예식장 이름</a:t>
             </a:r>
           </a:p>
         </p:txBody>
@@ -3959,7 +3959,7 @@
           <a:bodyPr/>
           <a:lstStyle/>
           <a:p>
-            <a:fld id="{A1F62FDA-6DCB-4AAF-A283-805751295E03}" type="slidenum">
+            <a:fld id="{E57272B5-97C9-46E7-9C4C-7DBF2A8562C4}" type="slidenum">
               <a:rPr lang="en-US"/>
               <a:t>‹#›</a:t>
             </a:fld>
@@ -4361,7 +4361,7 @@
           <a:bodyPr/>
           <a:lstStyle/>
           <a:p>
-            <a:fld id="{C27258C8-3878-4F52-942E-6AFD762F291B}" type="slidenum">
+            <a:fld id="{3194AEEA-1A84-4EE3-AC5D-E1F3B432F8D1}" type="slidenum">
               <a:rPr lang="en-US"/>
               <a:t>‹#›</a:t>
             </a:fld>
@@ -4959,7 +4959,7 @@
           <a:bodyPr/>
           <a:lstStyle/>
           <a:p>
-            <a:fld id="{CFA2FD2A-9009-49AB-98FF-41BC0A0F7946}" type="slidenum">
+            <a:fld id="{C80B4EC0-A2DA-4068-BAA8-E530A935B7CE}" type="slidenum">
               <a:rPr lang="en-US"/>
               <a:t>‹#›</a:t>
             </a:fld>
@@ -5885,7 +5885,7 @@
           <a:bodyPr/>
           <a:lstStyle/>
           <a:p>
-            <a:fld id="{1573DFB6-07BF-44B5-9E8C-24A919F35CB7}" type="slidenum">
+            <a:fld id="{A1F0EB95-3115-4027-8EA7-1A6EF811A217}" type="slidenum">
               <a:rPr lang="en-US"/>
               <a:t>‹#›</a:t>
             </a:fld>
@@ -5973,7 +5973,7 @@
           <a:bodyPr/>
           <a:lstStyle/>
           <a:p>
-            <a:fld id="{3C5DBE63-54A0-48B9-B912-57A35AD7C72A}" type="slidenum">
+            <a:fld id="{A6178BD9-335F-4FCD-898D-BC14BF6F4970}" type="slidenum">
               <a:rPr lang="en-US"/>
               <a:t>‹#›</a:t>
             </a:fld>
